--- a/ppts/CHAPTER 4 Using LangGraph to Add Memory to Your Chatbot.pptx
+++ b/ppts/CHAPTER 4 Using LangGraph to Add Memory to Your Chatbot.pptx
@@ -270,7 +270,7 @@
                 <a:latin typeface="맑은 고딕" panose="020B0503020000020004" pitchFamily="50" charset="-127"/>
                 <a:ea typeface="맑은 고딕" panose="020B0503020000020004" pitchFamily="50" charset="-127"/>
               </a:rPr>
-              <a:t>2026-07-21</a:t>
+              <a:t>2026-08-20</a:t>
             </a:fld>
             <a:endParaRPr lang="ko-KR" altLang="en-US">
               <a:latin typeface="맑은 고딕" panose="020B0503020000020004" pitchFamily="50" charset="-127"/>
@@ -456,7 +456,7 @@
           <a:p>
             <a:fld id="{43E1C3DD-4A19-441D-907C-380838DB51C4}" type="datetime1">
               <a:rPr lang="ko-KR" altLang="en-US" noProof="0" smtClean="0"/>
-              <a:t>2026-07-21</a:t>
+              <a:t>2026-08-20</a:t>
             </a:fld>
             <a:endParaRPr lang="ko-KR" altLang="en-US" noProof="0"/>
           </a:p>
@@ -1304,7 +1304,7 @@
           <a:p>
             <a:fld id="{990475B5-67CA-4281-BDCA-DA943C3C8EB3}" type="datetime1">
               <a:rPr lang="ko-KR" altLang="en-US" noProof="0" smtClean="0"/>
-              <a:t>2026-07-21</a:t>
+              <a:t>2026-08-20</a:t>
             </a:fld>
             <a:endParaRPr lang="ko-KR" altLang="en-US" noProof="0"/>
           </a:p>
@@ -1958,7 +1958,7 @@
           <a:p>
             <a:fld id="{48A87A34-81AB-432B-8DAE-1953F412C126}" type="datetimeFigureOut">
               <a:rPr lang="en-US" smtClean="0"/>
-              <a:t>7/21/2026</a:t>
+              <a:t>8/20/2026</a:t>
             </a:fld>
             <a:endParaRPr lang="en-US" dirty="0"/>
           </a:p>
@@ -2254,7 +2254,7 @@
           <a:p>
             <a:fld id="{C655C81E-72E7-4D05-94B5-F45B321A525D}" type="datetime1">
               <a:rPr lang="ko-KR" altLang="en-US" noProof="0" smtClean="0"/>
-              <a:t>2026-07-21</a:t>
+              <a:t>2026-08-20</a:t>
             </a:fld>
             <a:endParaRPr lang="ko-KR" altLang="en-US" noProof="0" dirty="0">
               <a:latin typeface="맑은 고딕" panose="020B0503020000020004" pitchFamily="50" charset="-127"/>
@@ -5274,8 +5274,8 @@
         </p:nvSpPr>
         <p:spPr>
           <a:xfrm>
-            <a:off x="3570239" y="3909530"/>
-            <a:ext cx="6413498" cy="1677190"/>
+            <a:off x="1685925" y="4519130"/>
+            <a:ext cx="9848850" cy="1501052"/>
           </a:xfrm>
           <a:prstGeom prst="rect">
             <a:avLst/>
@@ -5301,12 +5301,23 @@
               <a:buChar char="v"/>
             </a:pPr>
             <a:r>
-              <a:rPr lang="en-US" altLang="ko-KR" dirty="0">
-                <a:latin typeface="D2Coding" panose="020B0609020101020101" pitchFamily="49" charset="-127"/>
-                <a:ea typeface="D2Coding" panose="020B0609020101020101" pitchFamily="49" charset="-127"/>
-              </a:rPr>
-              <a:t>Trimming Messages</a:t>
-            </a:r>
+              <a:rPr lang="en-US" altLang="ko-KR" sz="1600" dirty="0">
+                <a:latin typeface="D2Coding" panose="020B0609020101020101" pitchFamily="49" charset="-127"/>
+                <a:ea typeface="D2Coding" panose="020B0609020101020101" pitchFamily="49" charset="-127"/>
+              </a:rPr>
+              <a:t>Trimming Messages : </a:t>
+            </a:r>
+            <a:r>
+              <a:rPr lang="ko-KR" altLang="en-US" sz="1600" dirty="0">
+                <a:latin typeface="D2Coding" panose="020B0609020101020101" pitchFamily="49" charset="-127"/>
+                <a:ea typeface="D2Coding" panose="020B0609020101020101" pitchFamily="49" charset="-127"/>
+              </a:rPr>
+              <a:t>LLM 컨텍스트 한도를 넘지 않게 최신 메시지 위주로 자르기</a:t>
+            </a:r>
+            <a:endParaRPr lang="en-US" altLang="ko-KR" sz="1600" dirty="0">
+              <a:latin typeface="D2Coding" panose="020B0609020101020101" pitchFamily="49" charset="-127"/>
+              <a:ea typeface="D2Coding" panose="020B0609020101020101" pitchFamily="49" charset="-127"/>
+            </a:endParaRPr>
           </a:p>
           <a:p>
             <a:pPr marL="285750" indent="-285750">
@@ -5317,12 +5328,37 @@
               <a:buChar char="v"/>
             </a:pPr>
             <a:r>
-              <a:rPr lang="en-US" altLang="ko-KR" dirty="0">
-                <a:latin typeface="D2Coding" panose="020B0609020101020101" pitchFamily="49" charset="-127"/>
-                <a:ea typeface="D2Coding" panose="020B0609020101020101" pitchFamily="49" charset="-127"/>
-              </a:rPr>
-              <a:t>Filtering Messages</a:t>
-            </a:r>
+              <a:rPr lang="en-US" altLang="ko-KR" sz="1600" dirty="0">
+                <a:latin typeface="D2Coding" panose="020B0609020101020101" pitchFamily="49" charset="-127"/>
+                <a:ea typeface="D2Coding" panose="020B0609020101020101" pitchFamily="49" charset="-127"/>
+              </a:rPr>
+              <a:t>Filtering Messages : </a:t>
+            </a:r>
+            <a:r>
+              <a:rPr lang="ko-KR" altLang="en-US" sz="1600" dirty="0">
+                <a:latin typeface="D2Coding" panose="020B0609020101020101" pitchFamily="49" charset="-127"/>
+                <a:ea typeface="D2Coding" panose="020B0609020101020101" pitchFamily="49" charset="-127"/>
+              </a:rPr>
+              <a:t>필요한 메시지 타입(</a:t>
+            </a:r>
+            <a:r>
+              <a:rPr lang="ko-KR" altLang="en-US" sz="1600" dirty="0" err="1">
+                <a:latin typeface="D2Coding" panose="020B0609020101020101" pitchFamily="49" charset="-127"/>
+                <a:ea typeface="D2Coding" panose="020B0609020101020101" pitchFamily="49" charset="-127"/>
+              </a:rPr>
+              <a:t>HumanMessage</a:t>
+            </a:r>
+            <a:r>
+              <a:rPr lang="ko-KR" altLang="en-US" sz="1600" dirty="0">
+                <a:latin typeface="D2Coding" panose="020B0609020101020101" pitchFamily="49" charset="-127"/>
+                <a:ea typeface="D2Coding" panose="020B0609020101020101" pitchFamily="49" charset="-127"/>
+              </a:rPr>
+              <a:t> 등)만 쏙 뼈대만 추리기</a:t>
+            </a:r>
+            <a:endParaRPr lang="en-US" altLang="ko-KR" sz="1600" dirty="0">
+              <a:latin typeface="D2Coding" panose="020B0609020101020101" pitchFamily="49" charset="-127"/>
+              <a:ea typeface="D2Coding" panose="020B0609020101020101" pitchFamily="49" charset="-127"/>
+            </a:endParaRPr>
           </a:p>
           <a:p>
             <a:pPr marL="285750" indent="-285750">
@@ -5333,16 +5369,19 @@
               <a:buChar char="v"/>
             </a:pPr>
             <a:r>
-              <a:rPr lang="en-US" altLang="ko-KR" dirty="0">
-                <a:latin typeface="D2Coding" panose="020B0609020101020101" pitchFamily="49" charset="-127"/>
-                <a:ea typeface="D2Coding" panose="020B0609020101020101" pitchFamily="49" charset="-127"/>
-              </a:rPr>
-              <a:t>Merging Consecutive Messages</a:t>
-            </a:r>
-            <a:endParaRPr lang="ko-KR" altLang="en-US" dirty="0">
-              <a:latin typeface="D2Coding" panose="020B0609020101020101" pitchFamily="49" charset="-127"/>
-              <a:ea typeface="D2Coding" panose="020B0609020101020101" pitchFamily="49" charset="-127"/>
-            </a:endParaRPr>
+              <a:rPr lang="en-US" altLang="ko-KR" sz="1600" dirty="0">
+                <a:latin typeface="D2Coding" panose="020B0609020101020101" pitchFamily="49" charset="-127"/>
+                <a:ea typeface="D2Coding" panose="020B0609020101020101" pitchFamily="49" charset="-127"/>
+              </a:rPr>
+              <a:t>Merging Consecutive Messages : </a:t>
+            </a:r>
+            <a:r>
+              <a:rPr lang="ko-KR" altLang="en-US" sz="1600" dirty="0">
+                <a:latin typeface="D2Coding" panose="020B0609020101020101" pitchFamily="49" charset="-127"/>
+                <a:ea typeface="D2Coding" panose="020B0609020101020101" pitchFamily="49" charset="-127"/>
+              </a:rPr>
+              <a:t>연속으로 들어온 같은 타입의 메시지를 하나로 깔끔하게 뭉치기</a:t>
+            </a:r>
           </a:p>
         </p:txBody>
       </p:sp>
@@ -5360,8 +5399,8 @@
         </p:nvSpPr>
         <p:spPr>
           <a:xfrm>
-            <a:off x="714375" y="1336457"/>
-            <a:ext cx="10763250" cy="1901161"/>
+            <a:off x="647700" y="1546007"/>
+            <a:ext cx="10896600" cy="1901161"/>
           </a:xfrm>
           <a:prstGeom prst="rect">
             <a:avLst/>
@@ -5515,7 +5554,7 @@
                 <a:latin typeface="D2Coding" panose="020B0609020101020101" pitchFamily="49" charset="-127"/>
                 <a:ea typeface="D2Coding" panose="020B0609020101020101" pitchFamily="49" charset="-127"/>
               </a:rPr>
-              <a:t>벡터 저장소 활용하여 관련 있는 정보만 추출하는 방법</a:t>
+              <a:t>벡터 저장소를 활용하여 관련 있는 정보만 추출하는 방법</a:t>
             </a:r>
           </a:p>
         </p:txBody>
@@ -5538,12 +5577,12 @@
         </p:nvCxnSpPr>
         <p:spPr>
           <a:xfrm rot="10800000" flipH="1" flipV="1">
-            <a:off x="714375" y="2287037"/>
-            <a:ext cx="2855864" cy="2461087"/>
+            <a:off x="647699" y="2496588"/>
+            <a:ext cx="1038225" cy="2773068"/>
           </a:xfrm>
           <a:prstGeom prst="bentConnector3">
             <a:avLst>
-              <a:gd name="adj1" fmla="val -8005"/>
+              <a:gd name="adj1" fmla="val -22018"/>
             </a:avLst>
           </a:prstGeom>
           <a:ln>
@@ -5730,7 +5769,7 @@
         <p:spPr>
           <a:xfrm>
             <a:off x="700086" y="2279720"/>
-            <a:ext cx="11091863" cy="3747821"/>
+            <a:ext cx="11091863" cy="3009157"/>
           </a:xfrm>
           <a:prstGeom prst="rect">
             <a:avLst/>
@@ -5986,8 +6025,8 @@
               <a:lnSpc>
                 <a:spcPct val="150000"/>
               </a:lnSpc>
-              <a:buFont typeface="+mj-lt"/>
-              <a:buAutoNum type="arabicPeriod"/>
+              <a:buFont typeface="Wingdings" panose="05000000000000000000" pitchFamily="2" charset="2"/>
+              <a:buChar char="v"/>
             </a:pPr>
             <a:r>
               <a:rPr lang="ko-KR" altLang="en-US" sz="1600" dirty="0" err="1">
@@ -5997,72 +6036,44 @@
               <a:t>trim_messages</a:t>
             </a:r>
             <a:r>
-              <a:rPr lang="ko-KR" altLang="en-US" sz="1600" dirty="0">
-                <a:latin typeface="D2Coding" panose="020B0609020101020101" pitchFamily="49" charset="-127"/>
-                <a:ea typeface="D2Coding" panose="020B0609020101020101" pitchFamily="49" charset="-127"/>
-              </a:rPr>
-              <a:t>: LLM 컨텍스트 한도를 넘지 않게 최신 메시지 위주로 자르기</a:t>
-            </a:r>
-          </a:p>
-          <a:p>
-            <a:pPr marL="800100" lvl="1" indent="-342900">
-              <a:lnSpc>
-                <a:spcPct val="150000"/>
-              </a:lnSpc>
-              <a:buFont typeface="+mj-lt"/>
-              <a:buAutoNum type="arabicPeriod"/>
-            </a:pPr>
+              <a:rPr lang="en-US" altLang="ko-KR" sz="1600" dirty="0">
+                <a:latin typeface="D2Coding" panose="020B0609020101020101" pitchFamily="49" charset="-127"/>
+                <a:ea typeface="D2Coding" panose="020B0609020101020101" pitchFamily="49" charset="-127"/>
+              </a:rPr>
+              <a:t>, f</a:t>
+            </a:r>
             <a:r>
               <a:rPr lang="ko-KR" altLang="en-US" sz="1600" dirty="0" err="1">
                 <a:latin typeface="D2Coding" panose="020B0609020101020101" pitchFamily="49" charset="-127"/>
                 <a:ea typeface="D2Coding" panose="020B0609020101020101" pitchFamily="49" charset="-127"/>
               </a:rPr>
-              <a:t>filter_messages</a:t>
-            </a:r>
-            <a:r>
-              <a:rPr lang="ko-KR" altLang="en-US" sz="1600" dirty="0">
-                <a:latin typeface="D2Coding" panose="020B0609020101020101" pitchFamily="49" charset="-127"/>
-                <a:ea typeface="D2Coding" panose="020B0609020101020101" pitchFamily="49" charset="-127"/>
-              </a:rPr>
-              <a:t>: 필요한 메시지 타입(</a:t>
+              <a:t>ilter_messages</a:t>
+            </a:r>
+            <a:r>
+              <a:rPr lang="en-US" altLang="ko-KR" sz="1600" dirty="0">
+                <a:latin typeface="D2Coding" panose="020B0609020101020101" pitchFamily="49" charset="-127"/>
+                <a:ea typeface="D2Coding" panose="020B0609020101020101" pitchFamily="49" charset="-127"/>
+              </a:rPr>
+              <a:t>,</a:t>
+            </a:r>
+            <a:r>
+              <a:rPr lang="ko-KR" altLang="en-US" sz="1600" dirty="0">
+                <a:latin typeface="D2Coding" panose="020B0609020101020101" pitchFamily="49" charset="-127"/>
+                <a:ea typeface="D2Coding" panose="020B0609020101020101" pitchFamily="49" charset="-127"/>
+              </a:rPr>
+              <a:t> </a:t>
             </a:r>
             <a:r>
               <a:rPr lang="ko-KR" altLang="en-US" sz="1600" dirty="0" err="1">
                 <a:latin typeface="D2Coding" panose="020B0609020101020101" pitchFamily="49" charset="-127"/>
                 <a:ea typeface="D2Coding" panose="020B0609020101020101" pitchFamily="49" charset="-127"/>
               </a:rPr>
-              <a:t>HumanMessage</a:t>
-            </a:r>
-            <a:r>
-              <a:rPr lang="ko-KR" altLang="en-US" sz="1600" dirty="0">
-                <a:latin typeface="D2Coding" panose="020B0609020101020101" pitchFamily="49" charset="-127"/>
-                <a:ea typeface="D2Coding" panose="020B0609020101020101" pitchFamily="49" charset="-127"/>
-              </a:rPr>
-              <a:t> 등)만 쏙 뼈대만 추리기</a:t>
-            </a:r>
-          </a:p>
-          <a:p>
-            <a:pPr marL="800100" lvl="1" indent="-342900">
-              <a:lnSpc>
-                <a:spcPct val="150000"/>
-              </a:lnSpc>
-              <a:buFont typeface="+mj-lt"/>
-              <a:buAutoNum type="arabicPeriod"/>
-            </a:pPr>
-            <a:r>
-              <a:rPr lang="ko-KR" altLang="en-US" sz="1600" dirty="0" err="1">
-                <a:latin typeface="D2Coding" panose="020B0609020101020101" pitchFamily="49" charset="-127"/>
-                <a:ea typeface="D2Coding" panose="020B0609020101020101" pitchFamily="49" charset="-127"/>
-              </a:rPr>
               <a:t>merge_message_runs</a:t>
             </a:r>
-            <a:r>
-              <a:rPr lang="ko-KR" altLang="en-US" sz="1600" dirty="0">
-                <a:latin typeface="D2Coding" panose="020B0609020101020101" pitchFamily="49" charset="-127"/>
-                <a:ea typeface="D2Coding" panose="020B0609020101020101" pitchFamily="49" charset="-127"/>
-              </a:rPr>
-              <a:t>: 연속으로 들어온 같은 타입의 메시지를 하나로 깔끔하게 뭉치기</a:t>
-            </a:r>
+            <a:endParaRPr lang="ko-KR" altLang="en-US" sz="1600" dirty="0">
+              <a:latin typeface="D2Coding" panose="020B0609020101020101" pitchFamily="49" charset="-127"/>
+              <a:ea typeface="D2Coding" panose="020B0609020101020101" pitchFamily="49" charset="-127"/>
+            </a:endParaRPr>
           </a:p>
         </p:txBody>
       </p:sp>
